--- a/access-hierarchy-and-personas.pptx
+++ b/access-hierarchy-and-personas.pptx
@@ -8,9 +8,10 @@
     <p:sldId id="256" r:id="rId2"/>
     <p:sldId id="257" r:id="rId3"/>
     <p:sldId id="258" r:id="rId4"/>
+    <p:sldId id="259" r:id="rId5"/>
   </p:sldIdLst>
   <p:notesMasterIdLst>
-    <p:notesMasterId r:id="rId5"/>
+    <p:notesMasterId r:id="rId6"/>
   </p:notesMasterIdLst>
   <p:sldSz cx="12192000" cy="6858000"/>
   <p:notesSz cx="6858000" cy="12192000"/>
@@ -680,7 +681,7 @@
           <a:p>
             <a:r>
               <a:rPr lang="en-US" dirty="0"/>
-              <a:t>Each card names the client role and, on the right, the Acme permission set behind it. The monospace line is the account scope the group carries.</a:t>
+              <a:t>The decision is option 1 of the two we weighed: an account-level split rather than one combined Payments set plus a per-payment rule. It costs one extra group per team that both raises and approves, and it is the case that makes the group-level scope necessary rather than merely tidy.</a:t>
             </a:r>
             <a:endParaRPr lang="en-US" dirty="0"/>
           </a:p>
@@ -704,6 +705,94 @@
             <a:fld id="{F7021451-1387-4CA6-816F-3879F97B5CBC}" type="slidenum">
               <a:rPr lang="en-US"/>
               <a:t>3</a:t>
+            </a:fld>
+            <a:endParaRPr lang="en-US"/>
+          </a:p>
+        </p:txBody>
+      </p:sp>
+    </p:spTree>
+    <p:extLst>
+      <p:ext uri="{BB962C8B-B14F-4D97-AF65-F5344CB8AC3E}">
+        <p14:creationId xmlns:p14="http://schemas.microsoft.com/office/powerpoint/2010/main" val="1024086991"/>
+      </p:ext>
+    </p:extLst>
+  </p:cSld>
+  <p:clrMapOvr>
+    <a:masterClrMapping/>
+  </p:clrMapOvr>
+</p:notes>
+</file>
+
+<file path=ppt/notesSlides/notesSlide4.xml><?xml version="1.0" encoding="utf-8"?>
+<p:notes xmlns:a="http://schemas.openxmlformats.org/drawingml/2006/main" xmlns:r="http://schemas.openxmlformats.org/officeDocument/2006/relationships" xmlns:p="http://schemas.openxmlformats.org/presentationml/2006/main">
+  <p:cSld>
+    <p:spTree>
+      <p:nvGrpSpPr>
+        <p:cNvPr id="1" name=""/>
+        <p:cNvGrpSpPr/>
+        <p:nvPr/>
+      </p:nvGrpSpPr>
+      <p:grpSpPr>
+        <a:xfrm>
+          <a:off x="0" y="0"/>
+          <a:ext cx="0" cy="0"/>
+          <a:chOff x="0" y="0"/>
+          <a:chExt cx="0" cy="0"/>
+        </a:xfrm>
+      </p:grpSpPr>
+      <p:sp>
+        <p:nvSpPr>
+          <p:cNvPr id="2" name="Slide Image Placeholder 1"/>
+          <p:cNvSpPr>
+            <a:spLocks noGrp="1" noRot="1" noChangeAspect="1"/>
+          </p:cNvSpPr>
+          <p:nvPr>
+            <p:ph type="sldImg"/>
+          </p:nvPr>
+        </p:nvSpPr>
+        <p:spPr/>
+      </p:sp>
+      <p:sp>
+        <p:nvSpPr>
+          <p:cNvPr id="3" name="Notes Placeholder 2"/>
+          <p:cNvSpPr>
+            <a:spLocks noGrp="1"/>
+          </p:cNvSpPr>
+          <p:nvPr>
+            <p:ph type="body" idx="1"/>
+          </p:nvPr>
+        </p:nvSpPr>
+        <p:spPr/>
+        <p:txBody>
+          <a:bodyPr/>
+          <a:lstStyle/>
+          <a:p>
+            <a:r>
+              <a:rPr lang="en-US" dirty="0"/>
+              <a:t>Each card names the client role and, on the right, the Acme permission set behind it. The monospace line is the account scope the group carries.</a:t>
+            </a:r>
+            <a:endParaRPr lang="en-US" dirty="0"/>
+          </a:p>
+        </p:txBody>
+      </p:sp>
+      <p:sp>
+        <p:nvSpPr>
+          <p:cNvPr id="4" name="Slide Number Placeholder 3"/>
+          <p:cNvSpPr>
+            <a:spLocks noGrp="1"/>
+          </p:cNvSpPr>
+          <p:nvPr>
+            <p:ph type="sldNum" sz="quarter" idx="10"/>
+          </p:nvPr>
+        </p:nvSpPr>
+        <p:spPr/>
+        <p:txBody>
+          <a:bodyPr/>
+          <a:lstStyle/>
+          <a:p>
+            <a:fld id="{F7021451-1387-4CA6-816F-3879F97B5CBC}" type="slidenum">
+              <a:rPr lang="en-US"/>
+              <a:t>4</a:t>
             </a:fld>
             <a:endParaRPr lang="en-US"/>
           </a:p>
@@ -4315,7 +4404,7 @@
                 <a:ea typeface="Calibri" pitchFamily="34" charset="-122"/>
                 <a:cs typeface="Calibri" pitchFamily="34" charset="-120"/>
               </a:rPr>
-              <a:t>Two groups overlapping one account add up, and that is intended. Stopping someone approving their own payment order is a maker-checker rule, not a permission.</a:t>
+              <a:t>Scope is a predicate over account attributes, not a picked list: legal entity, country, currency, purpose. A picked list goes stale the day a new OTC account opens.</a:t>
             </a:r>
             <a:endParaRPr lang="en-US" sz="1000" dirty="0"/>
           </a:p>
@@ -4354,7 +4443,7 @@
                 <a:ea typeface="Calibri" pitchFamily="34" charset="-122"/>
                 <a:cs typeface="Calibri" pitchFamily="34" charset="-120"/>
               </a:rPr>
-              <a:t>Scope is a predicate over account attributes, not a picked list: legal entity, country, currency, purpose. A picked list goes stale the day a new OTC account opens.</a:t>
+              <a:t>Modern Treasury puts this constraint on the permission set. Their sets are client-authored, so it belongs there. Ours are Acme-managed and shared, so it cannot.</a:t>
             </a:r>
             <a:endParaRPr lang="en-US" sz="1000" dirty="0"/>
           </a:p>
@@ -4401,23 +4490,23 @@
         <p:spPr>
           <a:xfrm>
             <a:off x="548640" y="347472"/>
-            <a:ext cx="8229600" cy="548640"/>
-          </a:xfrm>
-          <a:prstGeom prst="rect">
-            <a:avLst/>
-          </a:prstGeom>
-          <a:noFill/>
-          <a:ln/>
-        </p:spPr>
-        <p:txBody>
-          <a:bodyPr wrap="square" lIns="0" tIns="0" rIns="0" bIns="0" rtlCol="0" anchor="ctr"/>
-          <a:lstStyle/>
-          <a:p>
-            <a:pPr indent="0" marL="0">
-              <a:buNone/>
-            </a:pPr>
-            <a:r>
-              <a:rPr lang="en-US" sz="3400" b="1" dirty="0">
+            <a:ext cx="10607040" cy="548640"/>
+          </a:xfrm>
+          <a:prstGeom prst="rect">
+            <a:avLst/>
+          </a:prstGeom>
+          <a:noFill/>
+          <a:ln/>
+        </p:spPr>
+        <p:txBody>
+          <a:bodyPr wrap="square" lIns="0" tIns="0" rIns="0" bIns="0" rtlCol="0" anchor="ctr"/>
+          <a:lstStyle/>
+          <a:p>
+            <a:pPr indent="0" marL="0">
+              <a:buNone/>
+            </a:pPr>
+            <a:r>
+              <a:rPr lang="en-US" sz="3200" b="1" dirty="0">
                 <a:solidFill>
                   <a:srgbClr val="0A3AB9"/>
                 </a:solidFill>
@@ -4425,9 +4514,9 @@
                 <a:ea typeface="Cambria" pitchFamily="34" charset="-122"/>
                 <a:cs typeface="Cambria" pitchFamily="34" charset="-120"/>
               </a:rPr>
-              <a:t>What each team asked for</a:t>
-            </a:r>
-            <a:endParaRPr lang="en-US" sz="3400" dirty="0"/>
+              <a:t>Decided: the maker and checker split is account level</a:t>
+            </a:r>
+            <a:endParaRPr lang="en-US" sz="3200" dirty="0"/>
           </a:p>
         </p:txBody>
       </p:sp>
@@ -4439,8 +4528,8 @@
         </p:nvSpPr>
         <p:spPr>
           <a:xfrm>
-            <a:off x="548640" y="914400"/>
-            <a:ext cx="10607040" cy="274320"/>
+            <a:off x="548640" y="932688"/>
+            <a:ext cx="10881360" cy="274320"/>
           </a:xfrm>
           <a:prstGeom prst="rect">
             <a:avLst/>
@@ -4464,7 +4553,7 @@
                 <a:ea typeface="Calibri" pitchFamily="34" charset="-122"/>
                 <a:cs typeface="Calibri" pitchFamily="34" charset="-120"/>
               </a:rPr>
-              <a:t>Eight stories, five Acme permission sets, eight client roles. Two pairs prove Role and Group are separate layers.</a:t>
+              <a:t>Payment Ops can be maker on some accounts and checker on others, and one person may hold both on a single account. That is a permission difference per account, so the model carries it.</a:t>
             </a:r>
             <a:endParaRPr lang="en-US" sz="1300" dirty="0"/>
           </a:p>
@@ -4479,11 +4568,77 @@
         <p:spPr>
           <a:xfrm>
             <a:off x="548640" y="1371600"/>
-            <a:ext cx="5376672" cy="1024128"/>
+            <a:ext cx="10881360" cy="457200"/>
           </a:xfrm>
           <a:prstGeom prst="roundRect">
             <a:avLst>
-              <a:gd name="adj" fmla="val 5357"/>
+              <a:gd name="adj" fmla="val 12000"/>
+            </a:avLst>
+          </a:prstGeom>
+          <a:solidFill>
+            <a:srgbClr val="0A3AB9"/>
+          </a:solidFill>
+          <a:ln w="12700">
+            <a:solidFill>
+              <a:srgbClr val="0A3AB9"/>
+            </a:solidFill>
+            <a:prstDash val="solid"/>
+          </a:ln>
+        </p:spPr>
+      </p:sp>
+      <p:sp>
+        <p:nvSpPr>
+          <p:cNvPr id="5" name="Text 3"/>
+          <p:cNvSpPr/>
+          <p:nvPr/>
+        </p:nvSpPr>
+        <p:spPr>
+          <a:xfrm>
+            <a:off x="777240" y="1371600"/>
+            <a:ext cx="10424160" cy="457200"/>
+          </a:xfrm>
+          <a:prstGeom prst="rect">
+            <a:avLst/>
+          </a:prstGeom>
+          <a:noFill/>
+          <a:ln/>
+        </p:spPr>
+        <p:txBody>
+          <a:bodyPr wrap="square" lIns="0" tIns="0" rIns="0" bIns="0" rtlCol="0" anchor="ctr"/>
+          <a:lstStyle/>
+          <a:p>
+            <a:pPr indent="0" marL="0">
+              <a:buNone/>
+            </a:pPr>
+            <a:r>
+              <a:rPr lang="en-US" sz="1350" b="1" dirty="0">
+                <a:solidFill>
+                  <a:srgbClr val="FFFFFF"/>
+                </a:solidFill>
+                <a:latin typeface="Calibri" pitchFamily="34" charset="0"/>
+                <a:ea typeface="Calibri" pitchFamily="34" charset="-122"/>
+                <a:cs typeface="Calibri" pitchFamily="34" charset="-120"/>
+              </a:rPr>
+              <a:t>Create and approve never share a permission set. A team that does both is two groups.</a:t>
+            </a:r>
+            <a:endParaRPr lang="en-US" sz="1350" dirty="0"/>
+          </a:p>
+        </p:txBody>
+      </p:sp>
+      <p:sp>
+        <p:nvSpPr>
+          <p:cNvPr id="6" name="Shape 4"/>
+          <p:cNvSpPr/>
+          <p:nvPr/>
+        </p:nvSpPr>
+        <p:spPr>
+          <a:xfrm>
+            <a:off x="548640" y="2011680"/>
+            <a:ext cx="5577840" cy="676656"/>
+          </a:xfrm>
+          <a:prstGeom prst="roundRect">
+            <a:avLst>
+              <a:gd name="adj" fmla="val 8108"/>
             </a:avLst>
           </a:prstGeom>
           <a:solidFill>
@@ -4499,6 +4654,1069 @@
       </p:sp>
       <p:sp>
         <p:nvSpPr>
+          <p:cNvPr id="7" name="Text 5"/>
+          <p:cNvSpPr/>
+          <p:nvPr/>
+        </p:nvSpPr>
+        <p:spPr>
+          <a:xfrm>
+            <a:off x="731520" y="2084832"/>
+            <a:ext cx="5212080" cy="201168"/>
+          </a:xfrm>
+          <a:prstGeom prst="rect">
+            <a:avLst/>
+          </a:prstGeom>
+          <a:noFill/>
+          <a:ln/>
+        </p:spPr>
+        <p:txBody>
+          <a:bodyPr wrap="square" lIns="0" tIns="0" rIns="0" bIns="0" rtlCol="0" anchor="ctr"/>
+          <a:lstStyle/>
+          <a:p>
+            <a:pPr indent="0" marL="0">
+              <a:buNone/>
+            </a:pPr>
+            <a:r>
+              <a:rPr lang="en-US" sz="1150" b="1" dirty="0">
+                <a:solidFill>
+                  <a:srgbClr val="121A2E"/>
+                </a:solidFill>
+                <a:latin typeface="Calibri" pitchFamily="34" charset="0"/>
+                <a:ea typeface="Calibri" pitchFamily="34" charset="-122"/>
+                <a:cs typeface="Calibri" pitchFamily="34" charset="-120"/>
+              </a:rPr>
+              <a:t>Sets stay split</a:t>
+            </a:r>
+            <a:endParaRPr lang="en-US" sz="1150" dirty="0"/>
+          </a:p>
+        </p:txBody>
+      </p:sp>
+      <p:sp>
+        <p:nvSpPr>
+          <p:cNvPr id="8" name="Text 6"/>
+          <p:cNvSpPr/>
+          <p:nvPr/>
+        </p:nvSpPr>
+        <p:spPr>
+          <a:xfrm>
+            <a:off x="731520" y="2304288"/>
+            <a:ext cx="5212080" cy="329184"/>
+          </a:xfrm>
+          <a:prstGeom prst="rect">
+            <a:avLst/>
+          </a:prstGeom>
+          <a:noFill/>
+          <a:ln/>
+        </p:spPr>
+        <p:txBody>
+          <a:bodyPr wrap="square" lIns="0" tIns="0" rIns="0" bIns="0" rtlCol="0" anchor="ctr"/>
+          <a:lstStyle/>
+          <a:p>
+            <a:pPr indent="0" marL="0">
+              <a:buNone/>
+            </a:pPr>
+            <a:r>
+              <a:rPr lang="en-US" sz="950" dirty="0">
+                <a:solidFill>
+                  <a:srgbClr val="5B6478"/>
+                </a:solidFill>
+                <a:latin typeface="Calibri" pitchFamily="34" charset="0"/>
+                <a:ea typeface="Calibri" pitchFamily="34" charset="-122"/>
+                <a:cs typeface="Calibri" pitchFamily="34" charset="-120"/>
+              </a:rPr>
+              <a:t>Payments carries Payment Orders. Approvals carries Payment Approvals. Bundle them and the split cannot be expressed at all.</a:t>
+            </a:r>
+            <a:endParaRPr lang="en-US" sz="950" dirty="0"/>
+          </a:p>
+        </p:txBody>
+      </p:sp>
+      <p:sp>
+        <p:nvSpPr>
+          <p:cNvPr id="9" name="Shape 7"/>
+          <p:cNvSpPr/>
+          <p:nvPr/>
+        </p:nvSpPr>
+        <p:spPr>
+          <a:xfrm>
+            <a:off x="548640" y="2779776"/>
+            <a:ext cx="5577840" cy="676656"/>
+          </a:xfrm>
+          <a:prstGeom prst="roundRect">
+            <a:avLst>
+              <a:gd name="adj" fmla="val 8108"/>
+            </a:avLst>
+          </a:prstGeom>
+          <a:solidFill>
+            <a:srgbClr val="EFF3FD"/>
+          </a:solidFill>
+          <a:ln w="9525">
+            <a:solidFill>
+              <a:srgbClr val="DCE5F8"/>
+            </a:solidFill>
+            <a:prstDash val="solid"/>
+          </a:ln>
+        </p:spPr>
+      </p:sp>
+      <p:sp>
+        <p:nvSpPr>
+          <p:cNvPr id="10" name="Text 8"/>
+          <p:cNvSpPr/>
+          <p:nvPr/>
+        </p:nvSpPr>
+        <p:spPr>
+          <a:xfrm>
+            <a:off x="731520" y="2852928"/>
+            <a:ext cx="5212080" cy="201168"/>
+          </a:xfrm>
+          <a:prstGeom prst="rect">
+            <a:avLst/>
+          </a:prstGeom>
+          <a:noFill/>
+          <a:ln/>
+        </p:spPr>
+        <p:txBody>
+          <a:bodyPr wrap="square" lIns="0" tIns="0" rIns="0" bIns="0" rtlCol="0" anchor="ctr"/>
+          <a:lstStyle/>
+          <a:p>
+            <a:pPr indent="0" marL="0">
+              <a:buNone/>
+            </a:pPr>
+            <a:r>
+              <a:rPr lang="en-US" sz="1150" b="1" dirty="0">
+                <a:solidFill>
+                  <a:srgbClr val="121A2E"/>
+                </a:solidFill>
+                <a:latin typeface="Calibri" pitchFamily="34" charset="0"/>
+                <a:ea typeface="Calibri" pitchFamily="34" charset="-122"/>
+                <a:cs typeface="Calibri" pitchFamily="34" charset="-120"/>
+              </a:rPr>
+              <a:t>Two groups per team</a:t>
+            </a:r>
+            <a:endParaRPr lang="en-US" sz="1150" dirty="0"/>
+          </a:p>
+        </p:txBody>
+      </p:sp>
+      <p:sp>
+        <p:nvSpPr>
+          <p:cNvPr id="11" name="Text 9"/>
+          <p:cNvSpPr/>
+          <p:nvPr/>
+        </p:nvSpPr>
+        <p:spPr>
+          <a:xfrm>
+            <a:off x="731520" y="3072384"/>
+            <a:ext cx="5212080" cy="329184"/>
+          </a:xfrm>
+          <a:prstGeom prst="rect">
+            <a:avLst/>
+          </a:prstGeom>
+          <a:noFill/>
+          <a:ln/>
+        </p:spPr>
+        <p:txBody>
+          <a:bodyPr wrap="square" lIns="0" tIns="0" rIns="0" bIns="0" rtlCol="0" anchor="ctr"/>
+          <a:lstStyle/>
+          <a:p>
+            <a:pPr indent="0" marL="0">
+              <a:buNone/>
+            </a:pPr>
+            <a:r>
+              <a:rPr lang="en-US" sz="950" dirty="0">
+                <a:solidFill>
+                  <a:srgbClr val="5B6478"/>
+                </a:solidFill>
+                <a:latin typeface="Calibri" pitchFamily="34" charset="0"/>
+                <a:ea typeface="Calibri" pitchFamily="34" charset="-122"/>
+                <a:cs typeface="Calibri" pitchFamily="34" charset="-120"/>
+              </a:rPr>
+              <a:t>One per function, each with its own account scope. A person joins both where they hold both.</a:t>
+            </a:r>
+            <a:endParaRPr lang="en-US" sz="950" dirty="0"/>
+          </a:p>
+        </p:txBody>
+      </p:sp>
+      <p:sp>
+        <p:nvSpPr>
+          <p:cNvPr id="12" name="Shape 10"/>
+          <p:cNvSpPr/>
+          <p:nvPr/>
+        </p:nvSpPr>
+        <p:spPr>
+          <a:xfrm>
+            <a:off x="548640" y="3547872"/>
+            <a:ext cx="5577840" cy="676656"/>
+          </a:xfrm>
+          <a:prstGeom prst="roundRect">
+            <a:avLst>
+              <a:gd name="adj" fmla="val 8108"/>
+            </a:avLst>
+          </a:prstGeom>
+          <a:solidFill>
+            <a:srgbClr val="EFF3FD"/>
+          </a:solidFill>
+          <a:ln w="9525">
+            <a:solidFill>
+              <a:srgbClr val="DCE5F8"/>
+            </a:solidFill>
+            <a:prstDash val="solid"/>
+          </a:ln>
+        </p:spPr>
+      </p:sp>
+      <p:sp>
+        <p:nvSpPr>
+          <p:cNvPr id="13" name="Text 11"/>
+          <p:cNvSpPr/>
+          <p:nvPr/>
+        </p:nvSpPr>
+        <p:spPr>
+          <a:xfrm>
+            <a:off x="731520" y="3621024"/>
+            <a:ext cx="5212080" cy="201168"/>
+          </a:xfrm>
+          <a:prstGeom prst="rect">
+            <a:avLst/>
+          </a:prstGeom>
+          <a:noFill/>
+          <a:ln/>
+        </p:spPr>
+        <p:txBody>
+          <a:bodyPr wrap="square" lIns="0" tIns="0" rIns="0" bIns="0" rtlCol="0" anchor="ctr"/>
+          <a:lstStyle/>
+          <a:p>
+            <a:pPr indent="0" marL="0">
+              <a:buNone/>
+            </a:pPr>
+            <a:r>
+              <a:rPr lang="en-US" sz="1150" b="1" dirty="0">
+                <a:solidFill>
+                  <a:srgbClr val="121A2E"/>
+                </a:solidFill>
+                <a:latin typeface="Calibri" pitchFamily="34" charset="0"/>
+                <a:ea typeface="Calibri" pitchFamily="34" charset="-122"/>
+                <a:cs typeface="Calibri" pitchFamily="34" charset="-120"/>
+              </a:rPr>
+              <a:t>Growth moves to groups</a:t>
+            </a:r>
+            <a:endParaRPr lang="en-US" sz="1150" dirty="0"/>
+          </a:p>
+        </p:txBody>
+      </p:sp>
+      <p:sp>
+        <p:nvSpPr>
+          <p:cNvPr id="14" name="Text 12"/>
+          <p:cNvSpPr/>
+          <p:nvPr/>
+        </p:nvSpPr>
+        <p:spPr>
+          <a:xfrm>
+            <a:off x="731520" y="3840480"/>
+            <a:ext cx="5212080" cy="329184"/>
+          </a:xfrm>
+          <a:prstGeom prst="rect">
+            <a:avLst/>
+          </a:prstGeom>
+          <a:noFill/>
+          <a:ln/>
+        </p:spPr>
+        <p:txBody>
+          <a:bodyPr wrap="square" lIns="0" tIns="0" rIns="0" bIns="0" rtlCol="0" anchor="ctr"/>
+          <a:lstStyle/>
+          <a:p>
+            <a:pPr indent="0" marL="0">
+              <a:buNone/>
+            </a:pPr>
+            <a:r>
+              <a:rPr lang="en-US" sz="950" dirty="0">
+                <a:solidFill>
+                  <a:srgbClr val="5B6478"/>
+                </a:solidFill>
+                <a:latin typeface="Calibri" pitchFamily="34" charset="0"/>
+                <a:ea typeface="Calibri" pitchFamily="34" charset="-122"/>
+                <a:cs typeface="Calibri" pitchFamily="34" charset="-120"/>
+              </a:rPr>
+              <a:t>Group count grows by team multiplied by function. Groups are cheap because they define no capability.</a:t>
+            </a:r>
+            <a:endParaRPr lang="en-US" sz="950" dirty="0"/>
+          </a:p>
+        </p:txBody>
+      </p:sp>
+      <p:sp>
+        <p:nvSpPr>
+          <p:cNvPr id="15" name="Shape 13"/>
+          <p:cNvSpPr/>
+          <p:nvPr/>
+        </p:nvSpPr>
+        <p:spPr>
+          <a:xfrm>
+            <a:off x="548640" y="4315968"/>
+            <a:ext cx="5577840" cy="676656"/>
+          </a:xfrm>
+          <a:prstGeom prst="roundRect">
+            <a:avLst>
+              <a:gd name="adj" fmla="val 8108"/>
+            </a:avLst>
+          </a:prstGeom>
+          <a:solidFill>
+            <a:srgbClr val="EFF3FD"/>
+          </a:solidFill>
+          <a:ln w="9525">
+            <a:solidFill>
+              <a:srgbClr val="DCE5F8"/>
+            </a:solidFill>
+            <a:prstDash val="solid"/>
+          </a:ln>
+        </p:spPr>
+      </p:sp>
+      <p:sp>
+        <p:nvSpPr>
+          <p:cNvPr id="16" name="Text 14"/>
+          <p:cNvSpPr/>
+          <p:nvPr/>
+        </p:nvSpPr>
+        <p:spPr>
+          <a:xfrm>
+            <a:off x="731520" y="4389120"/>
+            <a:ext cx="5212080" cy="201168"/>
+          </a:xfrm>
+          <a:prstGeom prst="rect">
+            <a:avLst/>
+          </a:prstGeom>
+          <a:noFill/>
+          <a:ln/>
+        </p:spPr>
+        <p:txBody>
+          <a:bodyPr wrap="square" lIns="0" tIns="0" rIns="0" bIns="0" rtlCol="0" anchor="ctr"/>
+          <a:lstStyle/>
+          <a:p>
+            <a:pPr indent="0" marL="0">
+              <a:buNone/>
+            </a:pPr>
+            <a:r>
+              <a:rPr lang="en-US" sz="1150" b="1" dirty="0">
+                <a:solidFill>
+                  <a:srgbClr val="121A2E"/>
+                </a:solidFill>
+                <a:latin typeface="Calibri" pitchFamily="34" charset="0"/>
+                <a:ea typeface="Calibri" pitchFamily="34" charset="-122"/>
+                <a:cs typeface="Calibri" pitchFamily="34" charset="-120"/>
+              </a:rPr>
+              <a:t>Name them team, function, book</a:t>
+            </a:r>
+            <a:endParaRPr lang="en-US" sz="1150" dirty="0"/>
+          </a:p>
+        </p:txBody>
+      </p:sp>
+      <p:sp>
+        <p:nvSpPr>
+          <p:cNvPr id="17" name="Text 15"/>
+          <p:cNvSpPr/>
+          <p:nvPr/>
+        </p:nvSpPr>
+        <p:spPr>
+          <a:xfrm>
+            <a:off x="731520" y="4608576"/>
+            <a:ext cx="5212080" cy="329184"/>
+          </a:xfrm>
+          <a:prstGeom prst="rect">
+            <a:avLst/>
+          </a:prstGeom>
+          <a:noFill/>
+          <a:ln/>
+        </p:spPr>
+        <p:txBody>
+          <a:bodyPr wrap="square" lIns="0" tIns="0" rIns="0" bIns="0" rtlCol="0" anchor="ctr"/>
+          <a:lstStyle/>
+          <a:p>
+            <a:pPr indent="0" marL="0">
+              <a:buNone/>
+            </a:pPr>
+            <a:r>
+              <a:rPr lang="en-US" sz="950" dirty="0">
+                <a:solidFill>
+                  <a:srgbClr val="5B6478"/>
+                </a:solidFill>
+                <a:latin typeface="Calibri" pitchFamily="34" charset="0"/>
+                <a:ea typeface="Calibri" pitchFamily="34" charset="-122"/>
+                <a:cs typeface="Calibri" pitchFamily="34" charset="-120"/>
+              </a:rPr>
+              <a:t>Payment Ops APAC · Maker. Without that the group list stops being readable past twenty rows.</a:t>
+            </a:r>
+            <a:endParaRPr lang="en-US" sz="950" dirty="0"/>
+          </a:p>
+        </p:txBody>
+      </p:sp>
+      <p:sp>
+        <p:nvSpPr>
+          <p:cNvPr id="18" name="Text 16"/>
+          <p:cNvSpPr/>
+          <p:nvPr/>
+        </p:nvSpPr>
+        <p:spPr>
+          <a:xfrm>
+            <a:off x="6309360" y="2011680"/>
+            <a:ext cx="5120640" cy="219456"/>
+          </a:xfrm>
+          <a:prstGeom prst="rect">
+            <a:avLst/>
+          </a:prstGeom>
+          <a:noFill/>
+          <a:ln/>
+        </p:spPr>
+        <p:txBody>
+          <a:bodyPr wrap="square" lIns="0" tIns="0" rIns="0" bIns="0" rtlCol="0" anchor="ctr"/>
+          <a:lstStyle/>
+          <a:p>
+            <a:pPr indent="0" marL="0">
+              <a:buNone/>
+            </a:pPr>
+            <a:r>
+              <a:rPr lang="en-US" sz="1150" b="1" dirty="0">
+                <a:solidFill>
+                  <a:srgbClr val="121A2E"/>
+                </a:solidFill>
+                <a:latin typeface="Calibri" pitchFamily="34" charset="0"/>
+                <a:ea typeface="Calibri" pitchFamily="34" charset="-122"/>
+                <a:cs typeface="Calibri" pitchFamily="34" charset="-120"/>
+              </a:rPr>
+              <a:t>How Payment Ops APAC is modelled</a:t>
+            </a:r>
+            <a:endParaRPr lang="en-US" sz="1150" dirty="0"/>
+          </a:p>
+        </p:txBody>
+      </p:sp>
+      <p:sp>
+        <p:nvSpPr>
+          <p:cNvPr id="19" name="Shape 17"/>
+          <p:cNvSpPr/>
+          <p:nvPr/>
+        </p:nvSpPr>
+        <p:spPr>
+          <a:xfrm>
+            <a:off x="6309360" y="2322576"/>
+            <a:ext cx="5120640" cy="786384"/>
+          </a:xfrm>
+          <a:prstGeom prst="roundRect">
+            <a:avLst>
+              <a:gd name="adj" fmla="val 6977"/>
+            </a:avLst>
+          </a:prstGeom>
+          <a:solidFill>
+            <a:srgbClr val="FFFFFF"/>
+          </a:solidFill>
+          <a:ln w="15875">
+            <a:solidFill>
+              <a:srgbClr val="0A3AB9"/>
+            </a:solidFill>
+            <a:prstDash val="solid"/>
+          </a:ln>
+        </p:spPr>
+      </p:sp>
+      <p:sp>
+        <p:nvSpPr>
+          <p:cNvPr id="20" name="Text 18"/>
+          <p:cNvSpPr/>
+          <p:nvPr/>
+        </p:nvSpPr>
+        <p:spPr>
+          <a:xfrm>
+            <a:off x="6492240" y="2414016"/>
+            <a:ext cx="3291840" cy="219456"/>
+          </a:xfrm>
+          <a:prstGeom prst="rect">
+            <a:avLst/>
+          </a:prstGeom>
+          <a:noFill/>
+          <a:ln/>
+        </p:spPr>
+        <p:txBody>
+          <a:bodyPr wrap="square" lIns="0" tIns="0" rIns="0" bIns="0" rtlCol="0" anchor="ctr"/>
+          <a:lstStyle/>
+          <a:p>
+            <a:pPr indent="0" marL="0">
+              <a:buNone/>
+            </a:pPr>
+            <a:r>
+              <a:rPr lang="en-US" sz="1150" b="1" dirty="0">
+                <a:solidFill>
+                  <a:srgbClr val="121A2E"/>
+                </a:solidFill>
+                <a:latin typeface="Calibri" pitchFamily="34" charset="0"/>
+                <a:ea typeface="Calibri" pitchFamily="34" charset="-122"/>
+                <a:cs typeface="Calibri" pitchFamily="34" charset="-120"/>
+              </a:rPr>
+              <a:t>Payment Ops APAC · Maker</a:t>
+            </a:r>
+            <a:endParaRPr lang="en-US" sz="1150" dirty="0"/>
+          </a:p>
+        </p:txBody>
+      </p:sp>
+      <p:sp>
+        <p:nvSpPr>
+          <p:cNvPr id="21" name="Text 19"/>
+          <p:cNvSpPr/>
+          <p:nvPr/>
+        </p:nvSpPr>
+        <p:spPr>
+          <a:xfrm>
+            <a:off x="9829800" y="2423160"/>
+            <a:ext cx="1463040" cy="201168"/>
+          </a:xfrm>
+          <a:prstGeom prst="rect">
+            <a:avLst/>
+          </a:prstGeom>
+          <a:noFill/>
+          <a:ln/>
+        </p:spPr>
+        <p:txBody>
+          <a:bodyPr wrap="square" lIns="0" tIns="0" rIns="0" bIns="0" rtlCol="0" anchor="ctr"/>
+          <a:lstStyle/>
+          <a:p>
+            <a:pPr algn="r" indent="0" marL="0">
+              <a:buNone/>
+            </a:pPr>
+            <a:r>
+              <a:rPr lang="en-US" sz="950" dirty="0">
+                <a:solidFill>
+                  <a:srgbClr val="0A3AB9"/>
+                </a:solidFill>
+                <a:latin typeface="Calibri" pitchFamily="34" charset="0"/>
+                <a:ea typeface="Calibri" pitchFamily="34" charset="-122"/>
+                <a:cs typeface="Calibri" pitchFamily="34" charset="-120"/>
+              </a:rPr>
+              <a:t>Payments</a:t>
+            </a:r>
+            <a:endParaRPr lang="en-US" sz="950" dirty="0"/>
+          </a:p>
+        </p:txBody>
+      </p:sp>
+      <p:sp>
+        <p:nvSpPr>
+          <p:cNvPr id="22" name="Text 20"/>
+          <p:cNvSpPr/>
+          <p:nvPr/>
+        </p:nvSpPr>
+        <p:spPr>
+          <a:xfrm>
+            <a:off x="6492240" y="2706624"/>
+            <a:ext cx="4754880" cy="274320"/>
+          </a:xfrm>
+          <a:prstGeom prst="rect">
+            <a:avLst/>
+          </a:prstGeom>
+          <a:noFill/>
+          <a:ln/>
+        </p:spPr>
+        <p:txBody>
+          <a:bodyPr wrap="square" lIns="0" tIns="0" rIns="0" bIns="0" rtlCol="0" anchor="ctr"/>
+          <a:lstStyle/>
+          <a:p>
+            <a:pPr indent="0" marL="0">
+              <a:buNone/>
+            </a:pPr>
+            <a:r>
+              <a:rPr lang="en-US" sz="950" dirty="0">
+                <a:solidFill>
+                  <a:srgbClr val="5B6478"/>
+                </a:solidFill>
+                <a:latin typeface="Courier New" pitchFamily="34" charset="0"/>
+                <a:ea typeface="Courier New" pitchFamily="34" charset="-122"/>
+                <a:cs typeface="Courier New" pitchFamily="34" charset="-120"/>
+              </a:rPr>
+              <a:t>legalEntity = AMA</a:t>
+            </a:r>
+            <a:endParaRPr lang="en-US" sz="950" dirty="0"/>
+          </a:p>
+        </p:txBody>
+      </p:sp>
+      <p:sp>
+        <p:nvSpPr>
+          <p:cNvPr id="23" name="Shape 21"/>
+          <p:cNvSpPr/>
+          <p:nvPr/>
+        </p:nvSpPr>
+        <p:spPr>
+          <a:xfrm>
+            <a:off x="6309360" y="3218688"/>
+            <a:ext cx="5120640" cy="786384"/>
+          </a:xfrm>
+          <a:prstGeom prst="roundRect">
+            <a:avLst>
+              <a:gd name="adj" fmla="val 6977"/>
+            </a:avLst>
+          </a:prstGeom>
+          <a:solidFill>
+            <a:srgbClr val="FFFFFF"/>
+          </a:solidFill>
+          <a:ln w="15875">
+            <a:solidFill>
+              <a:srgbClr val="0A3AB9"/>
+            </a:solidFill>
+            <a:prstDash val="solid"/>
+          </a:ln>
+        </p:spPr>
+      </p:sp>
+      <p:sp>
+        <p:nvSpPr>
+          <p:cNvPr id="24" name="Text 22"/>
+          <p:cNvSpPr/>
+          <p:nvPr/>
+        </p:nvSpPr>
+        <p:spPr>
+          <a:xfrm>
+            <a:off x="6492240" y="3310128"/>
+            <a:ext cx="3291840" cy="219456"/>
+          </a:xfrm>
+          <a:prstGeom prst="rect">
+            <a:avLst/>
+          </a:prstGeom>
+          <a:noFill/>
+          <a:ln/>
+        </p:spPr>
+        <p:txBody>
+          <a:bodyPr wrap="square" lIns="0" tIns="0" rIns="0" bIns="0" rtlCol="0" anchor="ctr"/>
+          <a:lstStyle/>
+          <a:p>
+            <a:pPr indent="0" marL="0">
+              <a:buNone/>
+            </a:pPr>
+            <a:r>
+              <a:rPr lang="en-US" sz="1150" b="1" dirty="0">
+                <a:solidFill>
+                  <a:srgbClr val="121A2E"/>
+                </a:solidFill>
+                <a:latin typeface="Calibri" pitchFamily="34" charset="0"/>
+                <a:ea typeface="Calibri" pitchFamily="34" charset="-122"/>
+                <a:cs typeface="Calibri" pitchFamily="34" charset="-120"/>
+              </a:rPr>
+              <a:t>Payment Ops APAC · Checker</a:t>
+            </a:r>
+            <a:endParaRPr lang="en-US" sz="1150" dirty="0"/>
+          </a:p>
+        </p:txBody>
+      </p:sp>
+      <p:sp>
+        <p:nvSpPr>
+          <p:cNvPr id="25" name="Text 23"/>
+          <p:cNvSpPr/>
+          <p:nvPr/>
+        </p:nvSpPr>
+        <p:spPr>
+          <a:xfrm>
+            <a:off x="9829800" y="3319272"/>
+            <a:ext cx="1463040" cy="201168"/>
+          </a:xfrm>
+          <a:prstGeom prst="rect">
+            <a:avLst/>
+          </a:prstGeom>
+          <a:noFill/>
+          <a:ln/>
+        </p:spPr>
+        <p:txBody>
+          <a:bodyPr wrap="square" lIns="0" tIns="0" rIns="0" bIns="0" rtlCol="0" anchor="ctr"/>
+          <a:lstStyle/>
+          <a:p>
+            <a:pPr algn="r" indent="0" marL="0">
+              <a:buNone/>
+            </a:pPr>
+            <a:r>
+              <a:rPr lang="en-US" sz="950" dirty="0">
+                <a:solidFill>
+                  <a:srgbClr val="0A3AB9"/>
+                </a:solidFill>
+                <a:latin typeface="Calibri" pitchFamily="34" charset="0"/>
+                <a:ea typeface="Calibri" pitchFamily="34" charset="-122"/>
+                <a:cs typeface="Calibri" pitchFamily="34" charset="-120"/>
+              </a:rPr>
+              <a:t>Approvals</a:t>
+            </a:r>
+            <a:endParaRPr lang="en-US" sz="950" dirty="0"/>
+          </a:p>
+        </p:txBody>
+      </p:sp>
+      <p:sp>
+        <p:nvSpPr>
+          <p:cNvPr id="26" name="Text 24"/>
+          <p:cNvSpPr/>
+          <p:nvPr/>
+        </p:nvSpPr>
+        <p:spPr>
+          <a:xfrm>
+            <a:off x="6492240" y="3602736"/>
+            <a:ext cx="4754880" cy="274320"/>
+          </a:xfrm>
+          <a:prstGeom prst="rect">
+            <a:avLst/>
+          </a:prstGeom>
+          <a:noFill/>
+          <a:ln/>
+        </p:spPr>
+        <p:txBody>
+          <a:bodyPr wrap="square" lIns="0" tIns="0" rIns="0" bIns="0" rtlCol="0" anchor="ctr"/>
+          <a:lstStyle/>
+          <a:p>
+            <a:pPr indent="0" marL="0">
+              <a:buNone/>
+            </a:pPr>
+            <a:r>
+              <a:rPr lang="en-US" sz="950" dirty="0">
+                <a:solidFill>
+                  <a:srgbClr val="5B6478"/>
+                </a:solidFill>
+                <a:latin typeface="Courier New" pitchFamily="34" charset="0"/>
+                <a:ea typeface="Courier New" pitchFamily="34" charset="-122"/>
+                <a:cs typeface="Courier New" pitchFamily="34" charset="-120"/>
+              </a:rPr>
+              <a:t>legalEntity = AMA AND purpose != OTC</a:t>
+            </a:r>
+            <a:endParaRPr lang="en-US" sz="950" dirty="0"/>
+          </a:p>
+        </p:txBody>
+      </p:sp>
+      <p:sp>
+        <p:nvSpPr>
+          <p:cNvPr id="27" name="Shape 25"/>
+          <p:cNvSpPr/>
+          <p:nvPr/>
+        </p:nvSpPr>
+        <p:spPr>
+          <a:xfrm>
+            <a:off x="6309360" y="4206240"/>
+            <a:ext cx="5120640" cy="1371600"/>
+          </a:xfrm>
+          <a:prstGeom prst="roundRect">
+            <a:avLst>
+              <a:gd name="adj" fmla="val 4000"/>
+            </a:avLst>
+          </a:prstGeom>
+          <a:solidFill>
+            <a:srgbClr val="FDF1E9"/>
+          </a:solidFill>
+          <a:ln w="15875">
+            <a:solidFill>
+              <a:srgbClr val="A8410F"/>
+            </a:solidFill>
+            <a:prstDash val="solid"/>
+          </a:ln>
+        </p:spPr>
+      </p:sp>
+      <p:sp>
+        <p:nvSpPr>
+          <p:cNvPr id="28" name="Text 26"/>
+          <p:cNvSpPr/>
+          <p:nvPr/>
+        </p:nvSpPr>
+        <p:spPr>
+          <a:xfrm>
+            <a:off x="6492240" y="4297680"/>
+            <a:ext cx="4754880" cy="219456"/>
+          </a:xfrm>
+          <a:prstGeom prst="rect">
+            <a:avLst/>
+          </a:prstGeom>
+          <a:noFill/>
+          <a:ln/>
+        </p:spPr>
+        <p:txBody>
+          <a:bodyPr wrap="square" lIns="0" tIns="0" rIns="0" bIns="0" rtlCol="0" anchor="ctr"/>
+          <a:lstStyle/>
+          <a:p>
+            <a:pPr indent="0" marL="0">
+              <a:buNone/>
+            </a:pPr>
+            <a:r>
+              <a:rPr lang="en-US" sz="1150" b="1" dirty="0">
+                <a:solidFill>
+                  <a:srgbClr val="A8410F"/>
+                </a:solidFill>
+                <a:latin typeface="Calibri" pitchFamily="34" charset="0"/>
+                <a:ea typeface="Calibri" pitchFamily="34" charset="-122"/>
+                <a:cs typeface="Calibri" pitchFamily="34" charset="-120"/>
+              </a:rPr>
+              <a:t>This does not remove the four-eyes rule</a:t>
+            </a:r>
+            <a:endParaRPr lang="en-US" sz="1150" dirty="0"/>
+          </a:p>
+        </p:txBody>
+      </p:sp>
+      <p:sp>
+        <p:nvSpPr>
+          <p:cNvPr id="29" name="Text 27"/>
+          <p:cNvSpPr/>
+          <p:nvPr/>
+        </p:nvSpPr>
+        <p:spPr>
+          <a:xfrm>
+            <a:off x="6492240" y="4553712"/>
+            <a:ext cx="4754880" cy="932688"/>
+          </a:xfrm>
+          <a:prstGeom prst="rect">
+            <a:avLst/>
+          </a:prstGeom>
+          <a:noFill/>
+          <a:ln/>
+        </p:spPr>
+        <p:txBody>
+          <a:bodyPr wrap="square" lIns="0" tIns="0" rIns="0" bIns="0" rtlCol="0" anchor="ctr"/>
+          <a:lstStyle/>
+          <a:p>
+            <a:pPr indent="0" marL="0">
+              <a:buNone/>
+            </a:pPr>
+            <a:r>
+              <a:rPr lang="en-US" sz="950" b="1" dirty="0">
+                <a:solidFill>
+                  <a:srgbClr val="121A2E"/>
+                </a:solidFill>
+                <a:latin typeface="Calibri" pitchFamily="34" charset="0"/>
+                <a:ea typeface="Calibri" pitchFamily="34" charset="-122"/>
+                <a:cs typeface="Calibri" pitchFamily="34" charset="-120"/>
+              </a:rPr>
+              <a:t>Access control</a:t>
+            </a:r>
+            <a:pPr indent="0" marL="0">
+              <a:buNone/>
+            </a:pPr>
+            <a:r>
+              <a:rPr lang="en-US" sz="950" dirty="0">
+                <a:solidFill>
+                  <a:srgbClr val="5B6478"/>
+                </a:solidFill>
+                <a:latin typeface="Calibri" pitchFamily="34" charset="0"/>
+                <a:ea typeface="Calibri" pitchFamily="34" charset="-122"/>
+                <a:cs typeface="Calibri" pitchFamily="34" charset="-120"/>
+              </a:rPr>
+              <a:t> answers whether this person may ever approve on this account.</a:t>
+            </a:r>
+            <a:endParaRPr lang="en-US" sz="950" dirty="0"/>
+          </a:p>
+          <a:p>
+            <a:pPr indent="0" marL="0">
+              <a:buNone/>
+            </a:pPr>
+            <a:r>
+              <a:rPr lang="en-US" sz="950" b="1" dirty="0">
+                <a:solidFill>
+                  <a:srgbClr val="121A2E"/>
+                </a:solidFill>
+                <a:latin typeface="Calibri" pitchFamily="34" charset="0"/>
+                <a:ea typeface="Calibri" pitchFamily="34" charset="-122"/>
+                <a:cs typeface="Calibri" pitchFamily="34" charset="-120"/>
+              </a:rPr>
+              <a:t>The four-eyes rule</a:t>
+            </a:r>
+            <a:pPr indent="0" marL="0">
+              <a:buNone/>
+            </a:pPr>
+            <a:r>
+              <a:rPr lang="en-US" sz="950" dirty="0">
+                <a:solidFill>
+                  <a:srgbClr val="5B6478"/>
+                </a:solidFill>
+                <a:latin typeface="Calibri" pitchFamily="34" charset="0"/>
+                <a:ea typeface="Calibri" pitchFamily="34" charset="-122"/>
+                <a:cs typeface="Calibri" pitchFamily="34" charset="-120"/>
+              </a:rPr>
+              <a:t> answers whether they may approve this particular payment.</a:t>
+            </a:r>
+            <a:endParaRPr lang="en-US" sz="950" dirty="0"/>
+          </a:p>
+          <a:p>
+            <a:pPr indent="0" marL="0">
+              <a:buNone/>
+            </a:pPr>
+            <a:r>
+              <a:rPr lang="en-US" sz="950" dirty="0">
+                <a:solidFill>
+                  <a:srgbClr val="5B6478"/>
+                </a:solidFill>
+                <a:latin typeface="Calibri" pitchFamily="34" charset="0"/>
+                <a:ea typeface="Calibri" pitchFamily="34" charset="-122"/>
+                <a:cs typeface="Calibri" pitchFamily="34" charset="-120"/>
+              </a:rPr>
+              <a:t>Both are now required. Only the second would have been, had create and approve stayed in one set.</a:t>
+            </a:r>
+            <a:endParaRPr lang="en-US" sz="950" dirty="0"/>
+          </a:p>
+        </p:txBody>
+      </p:sp>
+      <p:sp>
+        <p:nvSpPr>
+          <p:cNvPr id="30" name="Text 28"/>
+          <p:cNvSpPr/>
+          <p:nvPr/>
+        </p:nvSpPr>
+        <p:spPr>
+          <a:xfrm>
+            <a:off x="548640" y="5943600"/>
+            <a:ext cx="11109960" cy="274320"/>
+          </a:xfrm>
+          <a:prstGeom prst="rect">
+            <a:avLst/>
+          </a:prstGeom>
+          <a:noFill/>
+          <a:ln/>
+        </p:spPr>
+        <p:txBody>
+          <a:bodyPr wrap="square" lIns="0" tIns="0" rIns="0" bIns="0" rtlCol="0" anchor="ctr"/>
+          <a:lstStyle/>
+          <a:p>
+            <a:pPr indent="0" marL="0">
+              <a:buNone/>
+            </a:pPr>
+            <a:r>
+              <a:rPr lang="en-US" sz="1000" i="1" dirty="0">
+                <a:solidFill>
+                  <a:srgbClr val="5B6478"/>
+                </a:solidFill>
+                <a:latin typeface="Calibri" pitchFamily="34" charset="0"/>
+                <a:ea typeface="Calibri" pitchFamily="34" charset="-122"/>
+                <a:cs typeface="Calibri" pitchFamily="34" charset="-120"/>
+              </a:rPr>
+              <a:t>Ticking permissions account by account in the UI is still ruled out: that is one row of state per account per permission, and it goes stale. The predicate scope delivers the same control without it.</a:t>
+            </a:r>
+            <a:endParaRPr lang="en-US" sz="1000" dirty="0"/>
+          </a:p>
+        </p:txBody>
+      </p:sp>
+    </p:spTree>
+  </p:cSld>
+  <p:clrMapOvr>
+    <a:masterClrMapping/>
+  </p:clrMapOvr>
+</p:sld>
+</file>
+
+<file path=ppt/slides/slide4.xml><?xml version="1.0" encoding="utf-8"?>
+<p:sld xmlns:a="http://schemas.openxmlformats.org/drawingml/2006/main" xmlns:r="http://schemas.openxmlformats.org/officeDocument/2006/relationships" xmlns:p="http://schemas.openxmlformats.org/presentationml/2006/main">
+  <p:cSld name="Slide 4">
+    <p:bg>
+      <p:bgPr>
+        <a:solidFill>
+          <a:srgbClr val="FFFFFF"/>
+        </a:solidFill>
+      </p:bgPr>
+    </p:bg>
+    <p:spTree>
+      <p:nvGrpSpPr>
+        <p:cNvPr id="1" name=""/>
+        <p:cNvGrpSpPr/>
+        <p:nvPr/>
+      </p:nvGrpSpPr>
+      <p:grpSpPr>
+        <a:xfrm>
+          <a:off x="0" y="0"/>
+          <a:ext cx="0" cy="0"/>
+          <a:chOff x="0" y="0"/>
+          <a:chExt cx="0" cy="0"/>
+        </a:xfrm>
+      </p:grpSpPr>
+      <p:sp>
+        <p:nvSpPr>
+          <p:cNvPr id="2" name="Text 0"/>
+          <p:cNvSpPr/>
+          <p:nvPr/>
+        </p:nvSpPr>
+        <p:spPr>
+          <a:xfrm>
+            <a:off x="548640" y="347472"/>
+            <a:ext cx="8229600" cy="548640"/>
+          </a:xfrm>
+          <a:prstGeom prst="rect">
+            <a:avLst/>
+          </a:prstGeom>
+          <a:noFill/>
+          <a:ln/>
+        </p:spPr>
+        <p:txBody>
+          <a:bodyPr wrap="square" lIns="0" tIns="0" rIns="0" bIns="0" rtlCol="0" anchor="ctr"/>
+          <a:lstStyle/>
+          <a:p>
+            <a:pPr indent="0" marL="0">
+              <a:buNone/>
+            </a:pPr>
+            <a:r>
+              <a:rPr lang="en-US" sz="3400" b="1" dirty="0">
+                <a:solidFill>
+                  <a:srgbClr val="0A3AB9"/>
+                </a:solidFill>
+                <a:latin typeface="Cambria" pitchFamily="34" charset="0"/>
+                <a:ea typeface="Cambria" pitchFamily="34" charset="-122"/>
+                <a:cs typeface="Cambria" pitchFamily="34" charset="-120"/>
+              </a:rPr>
+              <a:t>What each team asked for</a:t>
+            </a:r>
+            <a:endParaRPr lang="en-US" sz="3400" dirty="0"/>
+          </a:p>
+        </p:txBody>
+      </p:sp>
+      <p:sp>
+        <p:nvSpPr>
+          <p:cNvPr id="3" name="Text 1"/>
+          <p:cNvSpPr/>
+          <p:nvPr/>
+        </p:nvSpPr>
+        <p:spPr>
+          <a:xfrm>
+            <a:off x="548640" y="914400"/>
+            <a:ext cx="10607040" cy="274320"/>
+          </a:xfrm>
+          <a:prstGeom prst="rect">
+            <a:avLst/>
+          </a:prstGeom>
+          <a:noFill/>
+          <a:ln/>
+        </p:spPr>
+        <p:txBody>
+          <a:bodyPr wrap="square" lIns="0" tIns="0" rIns="0" bIns="0" rtlCol="0" anchor="ctr"/>
+          <a:lstStyle/>
+          <a:p>
+            <a:pPr indent="0" marL="0">
+              <a:buNone/>
+            </a:pPr>
+            <a:r>
+              <a:rPr lang="en-US" sz="1300" dirty="0">
+                <a:solidFill>
+                  <a:srgbClr val="5B6478"/>
+                </a:solidFill>
+                <a:latin typeface="Calibri" pitchFamily="34" charset="0"/>
+                <a:ea typeface="Calibri" pitchFamily="34" charset="-122"/>
+                <a:cs typeface="Calibri" pitchFamily="34" charset="-120"/>
+              </a:rPr>
+              <a:t>Eight stories, five Acme permission sets, nine client roles. Two pairs prove Role and Group are separate layers.</a:t>
+            </a:r>
+            <a:endParaRPr lang="en-US" sz="1300" dirty="0"/>
+          </a:p>
+        </p:txBody>
+      </p:sp>
+      <p:sp>
+        <p:nvSpPr>
+          <p:cNvPr id="4" name="Shape 2"/>
+          <p:cNvSpPr/>
+          <p:nvPr/>
+        </p:nvSpPr>
+        <p:spPr>
+          <a:xfrm>
+            <a:off x="548640" y="1371600"/>
+            <a:ext cx="5376672" cy="1024128"/>
+          </a:xfrm>
+          <a:prstGeom prst="roundRect">
+            <a:avLst>
+              <a:gd name="adj" fmla="val 5357"/>
+            </a:avLst>
+          </a:prstGeom>
+          <a:solidFill>
+            <a:srgbClr val="EFF3FD"/>
+          </a:solidFill>
+          <a:ln w="9525">
+            <a:solidFill>
+              <a:srgbClr val="DCE5F8"/>
+            </a:solidFill>
+            <a:prstDash val="solid"/>
+          </a:ln>
+        </p:spPr>
+      </p:sp>
+      <p:sp>
+        <p:nvSpPr>
           <p:cNvPr id="5" name="Shape 3"/>
           <p:cNvSpPr/>
           <p:nvPr/>
@@ -4711,7 +5929,7 @@
                 <a:ea typeface="Courier New" pitchFamily="34" charset="-122"/>
                 <a:cs typeface="Courier New" pitchFamily="34" charset="-120"/>
               </a:rPr>
-              <a:t>legalEntity = AMA</a:t>
+              <a:t>legalEntity = AMA  ·  maker half, checker is a 2nd group</a:t>
             </a:r>
             <a:endParaRPr lang="en-US" sz="850" dirty="0"/>
           </a:p>
@@ -6479,7 +7697,7 @@
                 <a:ea typeface="Calibri" pitchFamily="34" charset="-122"/>
                 <a:cs typeface="Calibri" pitchFamily="34" charset="-120"/>
               </a:rPr>
-              <a:t>Trading APAC and Trading US are one role over two scopes. FIAT Signer and Financial Controller are two roles over one permission set. Balances and Comments do not exist in the catalogue yet.</a:t>
+              <a:t>Trading APAC and Trading US are one role over two scopes. FIAT Signer, Financial Controller and Payment Approver are three roles over one permission set. Balances and Comments do not exist in the catalogue yet.</a:t>
             </a:r>
             <a:endParaRPr lang="en-US" sz="1000" dirty="0"/>
           </a:p>
